--- a/classes/parte-7-red-team-y-operaciones-ofensivas/163-emulacion-de-adversarios/clase-163-presentacion.pptx
+++ b/classes/parte-7-red-team-y-operaciones-ofensivas/163-emulacion-de-adversarios/clase-163-presentacion.pptx
@@ -17,6 +17,9 @@
     <p:sldId id="265" r:id="rId16"/>
     <p:sldId id="266" r:id="rId17"/>
     <p:sldId id="267" r:id="rId18"/>
+    <p:sldId id="268" r:id="rId19"/>
+    <p:sldId id="269" r:id="rId20"/>
+    <p:sldId id="270" r:id="rId21"/>
   </p:sldIdLst>
   <p:sldSz cx="9144000" cy="6858000" type="screen4x3"/>
   <p:notesSz cx="6858000" cy="9144000"/>
@@ -3198,7 +3201,7 @@
                   <a:srgbClr val="0B3D2E"/>
                 </a:solidFill>
               </a:rPr>
-              <a:t>⚠️ Errores comunes</a:t>
+              <a:t>✍️ Ejercicios</a:t>
             </a:r>
           </a:p>
         </p:txBody>
@@ -3236,67 +3239,82 @@
                   <a:srgbClr val="22282E"/>
                 </a:solidFill>
               </a:rPr>
-              <a:t>•  El plan es una lista sin orden — Faltan fases; encadena TTPs por dependencia</a:t>
-            </a:r>
-          </a:p>
-          <a:p>
-            <a:pPr>
-              <a:spcAft>
-                <a:spcPts val="600"/>
-              </a:spcAft>
-            </a:pPr>
-            <a:r>
-              <a:rPr sz="1500">
-                <a:solidFill>
-                  <a:srgbClr val="22282E"/>
-                </a:solidFill>
-              </a:rPr>
-              <a:t>•  Se copia el malware del actor — No es necesario ni seguro; reproduce el comportamiento, no el binario</a:t>
-            </a:r>
-          </a:p>
-          <a:p>
-            <a:pPr>
-              <a:spcAft>
-                <a:spcPts val="600"/>
-              </a:spcAft>
-            </a:pPr>
-            <a:r>
-              <a:rPr sz="1500">
-                <a:solidFill>
-                  <a:srgbClr val="22282E"/>
-                </a:solidFill>
-              </a:rPr>
-              <a:t>•  TTPs sin fuente — Emulación inventada; ancla cada técnica a un informe de CTI</a:t>
-            </a:r>
-          </a:p>
-          <a:p>
-            <a:pPr>
-              <a:spcAft>
-                <a:spcPts val="600"/>
-              </a:spcAft>
-            </a:pPr>
-            <a:r>
-              <a:rPr sz="1500">
-                <a:solidFill>
-                  <a:srgbClr val="22282E"/>
-                </a:solidFill>
-              </a:rPr>
-              <a:t>•  No se puede medir — Faltan criterios de detección; añádelos por fase</a:t>
-            </a:r>
-          </a:p>
-          <a:p>
-            <a:pPr>
-              <a:spcAft>
-                <a:spcPts val="600"/>
-              </a:spcAft>
-            </a:pPr>
-            <a:r>
-              <a:rPr sz="1500">
-                <a:solidFill>
-                  <a:srgbClr val="22282E"/>
-                </a:solidFill>
-              </a:rPr>
-              <a:t>•  Se elige un actor irreal para el entorno — Emular ICS en una red ofimática no aporta; ajusta el actor al objetivo</a:t>
+              <a:t>•  Explica con un ejemplo la diferencia entre emulación y simulación.</a:t>
+            </a:r>
+          </a:p>
+          <a:p>
+            <a:pPr>
+              <a:spcAft>
+                <a:spcPts val="600"/>
+              </a:spcAft>
+            </a:pPr>
+            <a:r>
+              <a:rPr sz="1500">
+                <a:solidFill>
+                  <a:srgbClr val="22282E"/>
+                </a:solidFill>
+              </a:rPr>
+              <a:t>•  Extrae 8 TTPs de un informe público de CTI y mapéalos a ATT&amp;CK.</a:t>
+            </a:r>
+          </a:p>
+          <a:p>
+            <a:pPr>
+              <a:spcAft>
+                <a:spcPts val="600"/>
+              </a:spcAft>
+            </a:pPr>
+            <a:r>
+              <a:rPr sz="1500">
+                <a:solidFill>
+                  <a:srgbClr val="22282E"/>
+                </a:solidFill>
+              </a:rPr>
+              <a:t>•  Ordena esos 8 TTPs en fases coherentes de un ataque.</a:t>
+            </a:r>
+          </a:p>
+          <a:p>
+            <a:pPr>
+              <a:spcAft>
+                <a:spcPts val="600"/>
+              </a:spcAft>
+            </a:pPr>
+            <a:r>
+              <a:rPr sz="1500">
+                <a:solidFill>
+                  <a:srgbClr val="22282E"/>
+                </a:solidFill>
+              </a:rPr>
+              <a:t>•  Elige una herramienta para reproducir cada uno de 5 TTPs.</a:t>
+            </a:r>
+          </a:p>
+          <a:p>
+            <a:pPr>
+              <a:spcAft>
+                <a:spcPts val="600"/>
+              </a:spcAft>
+            </a:pPr>
+            <a:r>
+              <a:rPr sz="1500">
+                <a:solidFill>
+                  <a:srgbClr val="22282E"/>
+                </a:solidFill>
+              </a:rPr>
+              <a:t>•  Redacta el criterio de detección para tres fases.</a:t>
+            </a:r>
+          </a:p>
+          <a:p>
+            <a:pPr>
+              <a:spcAft>
+                <a:spcPts val="600"/>
+              </a:spcAft>
+            </a:pPr>
+            <a:r>
+              <a:rPr sz="1500">
+                <a:solidFill>
+                  <a:srgbClr val="22282E"/>
+                </a:solidFill>
+              </a:rPr>
+              <a:t>•  Compara dos planes de la Emulation Library y señala una diferencia de estilo entre los dos actores.</a:t>
             </a:r>
           </a:p>
         </p:txBody>
@@ -3347,7 +3365,7 @@
                   <a:srgbClr val="0B3D2E"/>
                 </a:solidFill>
               </a:rPr>
-              <a:t>❓ Preguntas frecuentes</a:t>
+              <a:t>📝 Reto verificable</a:t>
             </a:r>
           </a:p>
         </p:txBody>
@@ -3385,82 +3403,22 @@
                   <a:srgbClr val="22282E"/>
                 </a:solidFill>
               </a:rPr>
-              <a:t>•  ❓ ¿Necesito el malware real del actor?</a:t>
-            </a:r>
-          </a:p>
-          <a:p>
-            <a:pPr>
-              <a:spcAft>
-                <a:spcPts val="600"/>
-              </a:spcAft>
-            </a:pPr>
-            <a:r>
-              <a:rPr sz="1500">
-                <a:solidFill>
-                  <a:srgbClr val="22282E"/>
-                </a:solidFill>
-              </a:rPr>
-              <a:t>•  No. Emulas el comportamiento (TTPs) con herramientas seguras y controladas. Usar malware real es peligroso e innecesario.</a:t>
-            </a:r>
-          </a:p>
-          <a:p>
-            <a:pPr>
-              <a:spcAft>
-                <a:spcPts val="600"/>
-              </a:spcAft>
-            </a:pPr>
-            <a:r>
-              <a:rPr sz="1500">
-                <a:solidFill>
-                  <a:srgbClr val="22282E"/>
-                </a:solidFill>
-              </a:rPr>
-              <a:t>•  ❓ ¿De dónde saco los TTPs de un actor?</a:t>
-            </a:r>
-          </a:p>
-          <a:p>
-            <a:pPr>
-              <a:spcAft>
-                <a:spcPts val="600"/>
-              </a:spcAft>
-            </a:pPr>
-            <a:r>
-              <a:rPr sz="1500">
-                <a:solidFill>
-                  <a:srgbClr val="22282E"/>
-                </a:solidFill>
-              </a:rPr>
-              <a:t>•  De su página en ATT&amp;CK (Groups), informes de proveedores de CTI y de la Emulation Library de MITRE.</a:t>
-            </a:r>
-          </a:p>
-          <a:p>
-            <a:pPr>
-              <a:spcAft>
-                <a:spcPts val="600"/>
-              </a:spcAft>
-            </a:pPr>
-            <a:r>
-              <a:rPr sz="1500">
-                <a:solidFill>
-                  <a:srgbClr val="22282E"/>
-                </a:solidFill>
-              </a:rPr>
-              <a:t>•  ❓ ¿Emulación o simulación para un cliente nuevo?</a:t>
-            </a:r>
-          </a:p>
-          <a:p>
-            <a:pPr>
-              <a:spcAft>
-                <a:spcPts val="600"/>
-              </a:spcAft>
-            </a:pPr>
-            <a:r>
-              <a:rPr sz="1500">
-                <a:solidFill>
-                  <a:srgbClr val="22282E"/>
-                </a:solidFill>
-              </a:rPr>
-              <a:t>•  La simulación (comportamientos genéricos) suele ser mejor punto de partida; la emulación de un actor específico aporta más cuando el cliente tiene un modelo de amenaza claro.</a:t>
+              <a:t>•  Entrega un plan de emulación de una página para un actor de tu elección (con base en CTI pública), que contenga al menos 10 TTPs organizados en 5 fases, la herramienta de reproducción por TTP y la…</a:t>
+            </a:r>
+          </a:p>
+          <a:p>
+            <a:pPr>
+              <a:spcAft>
+                <a:spcPts val="600"/>
+              </a:spcAft>
+            </a:pPr>
+            <a:r>
+              <a:rPr sz="1500">
+                <a:solidFill>
+                  <a:srgbClr val="22282E"/>
+                </a:solidFill>
+              </a:rPr>
+              <a:t>•  Criterio de aceptación: cada TTP tiene ID ATT&amp;CK válido, hay continuidad lógica entre fases (cada una habilita la siguiente) y las herramientas elegidas reproducen el comportamiento descrito en la…</a:t>
             </a:r>
           </a:p>
         </p:txBody>
@@ -3511,7 +3469,7 @@
                   <a:srgbClr val="0B3D2E"/>
                 </a:solidFill>
               </a:rPr>
-              <a:t>🔗 Referencias</a:t>
+              <a:t>⚠️ Errores comunes</a:t>
             </a:r>
           </a:p>
         </p:txBody>
@@ -3549,6 +3507,319 @@
                   <a:srgbClr val="22282E"/>
                 </a:solidFill>
               </a:rPr>
+              <a:t>•  El plan es una lista sin orden — Faltan fases; encadena TTPs por dependencia</a:t>
+            </a:r>
+          </a:p>
+          <a:p>
+            <a:pPr>
+              <a:spcAft>
+                <a:spcPts val="600"/>
+              </a:spcAft>
+            </a:pPr>
+            <a:r>
+              <a:rPr sz="1500">
+                <a:solidFill>
+                  <a:srgbClr val="22282E"/>
+                </a:solidFill>
+              </a:rPr>
+              <a:t>•  Se copia el malware del actor — No es necesario ni seguro; reproduce el comportamiento, no el binario</a:t>
+            </a:r>
+          </a:p>
+          <a:p>
+            <a:pPr>
+              <a:spcAft>
+                <a:spcPts val="600"/>
+              </a:spcAft>
+            </a:pPr>
+            <a:r>
+              <a:rPr sz="1500">
+                <a:solidFill>
+                  <a:srgbClr val="22282E"/>
+                </a:solidFill>
+              </a:rPr>
+              <a:t>•  TTPs sin fuente — Emulación inventada; ancla cada técnica a un informe de CTI</a:t>
+            </a:r>
+          </a:p>
+          <a:p>
+            <a:pPr>
+              <a:spcAft>
+                <a:spcPts val="600"/>
+              </a:spcAft>
+            </a:pPr>
+            <a:r>
+              <a:rPr sz="1500">
+                <a:solidFill>
+                  <a:srgbClr val="22282E"/>
+                </a:solidFill>
+              </a:rPr>
+              <a:t>•  No se puede medir — Faltan criterios de detección; añádelos por fase</a:t>
+            </a:r>
+          </a:p>
+          <a:p>
+            <a:pPr>
+              <a:spcAft>
+                <a:spcPts val="600"/>
+              </a:spcAft>
+            </a:pPr>
+            <a:r>
+              <a:rPr sz="1500">
+                <a:solidFill>
+                  <a:srgbClr val="22282E"/>
+                </a:solidFill>
+              </a:rPr>
+              <a:t>•  Se elige un actor irreal para el entorno — Emular ICS en una red ofimática no aporta; ajusta el actor al objetivo</a:t>
+            </a:r>
+          </a:p>
+        </p:txBody>
+      </p:sp>
+    </p:spTree>
+  </p:cSld>
+  <p:clrMapOvr>
+    <a:masterClrMapping/>
+  </p:clrMapOvr>
+</p:sld>
+</file>
+
+<file path=ppt/slides/slide13.xml><?xml version="1.0" encoding="utf-8"?>
+<p:sld xmlns:a="http://schemas.openxmlformats.org/drawingml/2006/main" xmlns:p="http://schemas.openxmlformats.org/presentationml/2006/main" xmlns:r="http://schemas.openxmlformats.org/officeDocument/2006/relationships">
+  <p:cSld>
+    <p:spTree>
+      <p:nvGrpSpPr>
+        <p:cNvPr id="1" name=""/>
+        <p:cNvGrpSpPr/>
+        <p:nvPr/>
+      </p:nvGrpSpPr>
+      <p:grpSpPr/>
+      <p:sp>
+        <p:nvSpPr>
+          <p:cNvPr id="2" name="TextBox 1"/>
+          <p:cNvSpPr txBox="1"/>
+          <p:nvPr/>
+        </p:nvSpPr>
+        <p:spPr>
+          <a:xfrm>
+            <a:off x="457200" y="320040"/>
+            <a:ext cx="8229600" cy="822960"/>
+          </a:xfrm>
+          <a:prstGeom prst="rect">
+            <a:avLst/>
+          </a:prstGeom>
+          <a:noFill/>
+        </p:spPr>
+        <p:txBody>
+          <a:bodyPr wrap="square">
+            <a:spAutoFit/>
+          </a:bodyPr>
+          <a:lstStyle/>
+          <a:p>
+            <a:r>
+              <a:rPr sz="2600" b="1">
+                <a:solidFill>
+                  <a:srgbClr val="0B3D2E"/>
+                </a:solidFill>
+              </a:rPr>
+              <a:t>❓ Preguntas frecuentes</a:t>
+            </a:r>
+          </a:p>
+        </p:txBody>
+      </p:sp>
+      <p:sp>
+        <p:nvSpPr>
+          <p:cNvPr id="3" name="TextBox 2"/>
+          <p:cNvSpPr txBox="1"/>
+          <p:nvPr/>
+        </p:nvSpPr>
+        <p:spPr>
+          <a:xfrm>
+            <a:off x="457200" y="1280160"/>
+            <a:ext cx="8229600" cy="4937760"/>
+          </a:xfrm>
+          <a:prstGeom prst="rect">
+            <a:avLst/>
+          </a:prstGeom>
+          <a:noFill/>
+        </p:spPr>
+        <p:txBody>
+          <a:bodyPr wrap="square">
+            <a:spAutoFit/>
+          </a:bodyPr>
+          <a:lstStyle/>
+          <a:p>
+            <a:pPr>
+              <a:spcAft>
+                <a:spcPts val="600"/>
+              </a:spcAft>
+            </a:pPr>
+            <a:r>
+              <a:rPr sz="1500">
+                <a:solidFill>
+                  <a:srgbClr val="22282E"/>
+                </a:solidFill>
+              </a:rPr>
+              <a:t>•  ❓ ¿Necesito el malware real del actor?</a:t>
+            </a:r>
+          </a:p>
+          <a:p>
+            <a:pPr>
+              <a:spcAft>
+                <a:spcPts val="600"/>
+              </a:spcAft>
+            </a:pPr>
+            <a:r>
+              <a:rPr sz="1500">
+                <a:solidFill>
+                  <a:srgbClr val="22282E"/>
+                </a:solidFill>
+              </a:rPr>
+              <a:t>•  No. Emulas el comportamiento (TTPs) con herramientas seguras y controladas. Usar malware real es peligroso e innecesario.</a:t>
+            </a:r>
+          </a:p>
+          <a:p>
+            <a:pPr>
+              <a:spcAft>
+                <a:spcPts val="600"/>
+              </a:spcAft>
+            </a:pPr>
+            <a:r>
+              <a:rPr sz="1500">
+                <a:solidFill>
+                  <a:srgbClr val="22282E"/>
+                </a:solidFill>
+              </a:rPr>
+              <a:t>•  ❓ ¿De dónde saco los TTPs de un actor?</a:t>
+            </a:r>
+          </a:p>
+          <a:p>
+            <a:pPr>
+              <a:spcAft>
+                <a:spcPts val="600"/>
+              </a:spcAft>
+            </a:pPr>
+            <a:r>
+              <a:rPr sz="1500">
+                <a:solidFill>
+                  <a:srgbClr val="22282E"/>
+                </a:solidFill>
+              </a:rPr>
+              <a:t>•  De su página en ATT&amp;CK (Groups), informes de proveedores de CTI y de la Emulation Library de MITRE.</a:t>
+            </a:r>
+          </a:p>
+          <a:p>
+            <a:pPr>
+              <a:spcAft>
+                <a:spcPts val="600"/>
+              </a:spcAft>
+            </a:pPr>
+            <a:r>
+              <a:rPr sz="1500">
+                <a:solidFill>
+                  <a:srgbClr val="22282E"/>
+                </a:solidFill>
+              </a:rPr>
+              <a:t>•  ❓ ¿Emulación o simulación para un cliente nuevo?</a:t>
+            </a:r>
+          </a:p>
+          <a:p>
+            <a:pPr>
+              <a:spcAft>
+                <a:spcPts val="600"/>
+              </a:spcAft>
+            </a:pPr>
+            <a:r>
+              <a:rPr sz="1500">
+                <a:solidFill>
+                  <a:srgbClr val="22282E"/>
+                </a:solidFill>
+              </a:rPr>
+              <a:t>•  La simulación (comportamientos genéricos) suele ser mejor punto de partida; la emulación de un actor específico aporta más cuando el cliente tiene un modelo de amenaza claro.</a:t>
+            </a:r>
+          </a:p>
+        </p:txBody>
+      </p:sp>
+    </p:spTree>
+  </p:cSld>
+  <p:clrMapOvr>
+    <a:masterClrMapping/>
+  </p:clrMapOvr>
+</p:sld>
+</file>
+
+<file path=ppt/slides/slide14.xml><?xml version="1.0" encoding="utf-8"?>
+<p:sld xmlns:a="http://schemas.openxmlformats.org/drawingml/2006/main" xmlns:p="http://schemas.openxmlformats.org/presentationml/2006/main" xmlns:r="http://schemas.openxmlformats.org/officeDocument/2006/relationships">
+  <p:cSld>
+    <p:spTree>
+      <p:nvGrpSpPr>
+        <p:cNvPr id="1" name=""/>
+        <p:cNvGrpSpPr/>
+        <p:nvPr/>
+      </p:nvGrpSpPr>
+      <p:grpSpPr/>
+      <p:sp>
+        <p:nvSpPr>
+          <p:cNvPr id="2" name="TextBox 1"/>
+          <p:cNvSpPr txBox="1"/>
+          <p:nvPr/>
+        </p:nvSpPr>
+        <p:spPr>
+          <a:xfrm>
+            <a:off x="457200" y="320040"/>
+            <a:ext cx="8229600" cy="822960"/>
+          </a:xfrm>
+          <a:prstGeom prst="rect">
+            <a:avLst/>
+          </a:prstGeom>
+          <a:noFill/>
+        </p:spPr>
+        <p:txBody>
+          <a:bodyPr wrap="square">
+            <a:spAutoFit/>
+          </a:bodyPr>
+          <a:lstStyle/>
+          <a:p>
+            <a:r>
+              <a:rPr sz="2600" b="1">
+                <a:solidFill>
+                  <a:srgbClr val="0B3D2E"/>
+                </a:solidFill>
+              </a:rPr>
+              <a:t>🔗 Referencias</a:t>
+            </a:r>
+          </a:p>
+        </p:txBody>
+      </p:sp>
+      <p:sp>
+        <p:nvSpPr>
+          <p:cNvPr id="3" name="TextBox 2"/>
+          <p:cNvSpPr txBox="1"/>
+          <p:nvPr/>
+        </p:nvSpPr>
+        <p:spPr>
+          <a:xfrm>
+            <a:off x="457200" y="1280160"/>
+            <a:ext cx="8229600" cy="4937760"/>
+          </a:xfrm>
+          <a:prstGeom prst="rect">
+            <a:avLst/>
+          </a:prstGeom>
+          <a:noFill/>
+        </p:spPr>
+        <p:txBody>
+          <a:bodyPr wrap="square">
+            <a:spAutoFit/>
+          </a:bodyPr>
+          <a:lstStyle/>
+          <a:p>
+            <a:pPr>
+              <a:spcAft>
+                <a:spcPts val="600"/>
+              </a:spcAft>
+            </a:pPr>
+            <a:r>
+              <a:rPr sz="1500">
+                <a:solidFill>
+                  <a:srgbClr val="22282E"/>
+                </a:solidFill>
+              </a:rPr>
               <a:t>•  MITRE CTID — Adversary Emulation Library. &lt;https://github.com/center-for-threat-informed-defense/adversaryemulationlibrary&gt;</a:t>
             </a:r>
           </a:p>
@@ -3599,6 +3870,81 @@
           </a:p>
         </p:txBody>
       </p:sp>
+    </p:spTree>
+  </p:cSld>
+  <p:clrMapOvr>
+    <a:masterClrMapping/>
+  </p:clrMapOvr>
+</p:sld>
+</file>
+
+<file path=ppt/slides/slide15.xml><?xml version="1.0" encoding="utf-8"?>
+<p:sld xmlns:a="http://schemas.openxmlformats.org/drawingml/2006/main" xmlns:p="http://schemas.openxmlformats.org/presentationml/2006/main" xmlns:r="http://schemas.openxmlformats.org/officeDocument/2006/relationships">
+  <p:cSld>
+    <p:spTree>
+      <p:nvGrpSpPr>
+        <p:cNvPr id="1" name=""/>
+        <p:cNvGrpSpPr/>
+        <p:nvPr/>
+      </p:nvGrpSpPr>
+      <p:grpSpPr/>
+      <p:sp>
+        <p:nvSpPr>
+          <p:cNvPr id="2" name="TextBox 1"/>
+          <p:cNvSpPr txBox="1"/>
+          <p:nvPr/>
+        </p:nvSpPr>
+        <p:spPr>
+          <a:xfrm>
+            <a:off x="457200" y="274320"/>
+            <a:ext cx="8229600" cy="640080"/>
+          </a:xfrm>
+          <a:prstGeom prst="rect">
+            <a:avLst/>
+          </a:prstGeom>
+          <a:noFill/>
+        </p:spPr>
+        <p:txBody>
+          <a:bodyPr wrap="square">
+            <a:spAutoFit/>
+          </a:bodyPr>
+          <a:lstStyle/>
+          <a:p>
+            <a:r>
+              <a:rPr sz="2200" b="1">
+                <a:solidFill>
+                  <a:srgbClr val="0B3D2E"/>
+                </a:solidFill>
+              </a:rPr>
+              <a:t>Diagrama de la clase</a:t>
+            </a:r>
+          </a:p>
+        </p:txBody>
+      </p:sp>
+      <p:pic>
+        <p:nvPicPr>
+          <p:cNvPr id="3" name="Picture 2" descr="4df61bd7abd0432c.png"/>
+          <p:cNvPicPr>
+            <a:picLocks noChangeAspect="1"/>
+          </p:cNvPicPr>
+          <p:nvPr/>
+        </p:nvPicPr>
+        <p:blipFill>
+          <a:blip r:embed="rId2"/>
+          <a:stretch>
+            <a:fillRect/>
+          </a:stretch>
+        </p:blipFill>
+        <p:spPr>
+          <a:xfrm>
+            <a:off x="457200" y="3465576"/>
+            <a:ext cx="8229600" cy="566928"/>
+          </a:xfrm>
+          <a:prstGeom prst="rect">
+            <a:avLst/>
+          </a:prstGeom>
+        </p:spPr>
+      </p:pic>
     </p:spTree>
   </p:cSld>
   <p:clrMapOvr>
@@ -3683,7 +4029,7 @@
                   <a:srgbClr val="22282E"/>
                 </a:solidFill>
               </a:rPr>
-              <a:t>•  Aprender a transformar threat intelligence sobre un actor real en un plan de emulación ejecutable: qué técnicas usa, en qué orden, con qué herramientas, y cómo reproducir su comportamiento de forma controlada para poner a prueba las defensas. El alumno pasará de "hacer hacking genérico" a "actuar como APT29 lo haría".</a:t>
+              <a:t>•  Aprender a transformar threat intelligence sobre un actor real en un plan de emulación ejecutable: qué técnicas usa, en qué orden, con qué herramientas, y cómo reproducir su comportamiento de forma…</a:t>
             </a:r>
           </a:p>
         </p:txBody>
@@ -4077,7 +4423,7 @@
                   <a:srgbClr val="0B3D2E"/>
                 </a:solidFill>
               </a:rPr>
-              <a:t>📖 Definiciones y características</a:t>
+              <a:t>🧠 Explicación en profundidad</a:t>
             </a:r>
           </a:p>
         </p:txBody>
@@ -4115,82 +4461,97 @@
                   <a:srgbClr val="22282E"/>
                 </a:solidFill>
               </a:rPr>
-              <a:t>•  Adversary emulation: reproducción fiel del comportamiento de un actor específico basada en CTI. Característica: imita TTPs, no solo objetivos.</a:t>
-            </a:r>
-          </a:p>
-          <a:p>
-            <a:pPr>
-              <a:spcAft>
-                <a:spcPts val="600"/>
-              </a:spcAft>
-            </a:pPr>
-            <a:r>
-              <a:rPr sz="1500">
-                <a:solidFill>
-                  <a:srgbClr val="22282E"/>
-                </a:solidFill>
-              </a:rPr>
-              <a:t>•  Adversary simulation: uso de comportamientos adversariales genéricos sin atarse a un actor. Característica: menos específica, más rápida.</a:t>
-            </a:r>
-          </a:p>
-          <a:p>
-            <a:pPr>
-              <a:spcAft>
-                <a:spcPts val="600"/>
-              </a:spcAft>
-            </a:pPr>
-            <a:r>
-              <a:rPr sz="1500">
-                <a:solidFill>
-                  <a:srgbClr val="22282E"/>
-                </a:solidFill>
-              </a:rPr>
-              <a:t>•  TTP (Tactics, Techniques, Procedures): la firma comportamental de un actor. Característica: más difícil de cambiar que un IOC.</a:t>
-            </a:r>
-          </a:p>
-          <a:p>
-            <a:pPr>
-              <a:spcAft>
-                <a:spcPts val="600"/>
-              </a:spcAft>
-            </a:pPr>
-            <a:r>
-              <a:rPr sz="1500">
-                <a:solidFill>
-                  <a:srgbClr val="22282E"/>
-                </a:solidFill>
-              </a:rPr>
-              <a:t>•  Emulation Plan: documento paso a paso que reproduce a un actor. Característica: encadena TTPs con herramientas y comandos.</a:t>
-            </a:r>
-          </a:p>
-          <a:p>
-            <a:pPr>
-              <a:spcAft>
-                <a:spcPts val="600"/>
-              </a:spcAft>
-            </a:pPr>
-            <a:r>
-              <a:rPr sz="1500">
-                <a:solidFill>
-                  <a:srgbClr val="22282E"/>
-                </a:solidFill>
-              </a:rPr>
-              <a:t>•  CTI (Cyber Threat Intelligence): información sobre actores, campañas y TTPs. Característica: es la materia prima del plan.</a:t>
-            </a:r>
-          </a:p>
-          <a:p>
-            <a:pPr>
-              <a:spcAft>
-                <a:spcPts val="600"/>
-              </a:spcAft>
-            </a:pPr>
-            <a:r>
-              <a:rPr sz="1500">
-                <a:solidFill>
-                  <a:srgbClr val="22282E"/>
-                </a:solidFill>
-              </a:rPr>
-              <a:t>•  Micro-emulation: emulación de un comportamiento pequeño y aislado (CTID). Característica: modular y componible.</a:t>
+              <a:t>•  La diferencia entre "hacer hacking" y emular a un adversario es la diferencia entre improvisar y seguir un guion basado en inteligencia. La emulación de adversarios toma lo que sabemos de un actor…</a:t>
+            </a:r>
+          </a:p>
+          <a:p>
+            <a:pPr>
+              <a:spcAft>
+                <a:spcPts val="600"/>
+              </a:spcAft>
+            </a:pPr>
+            <a:r>
+              <a:rPr sz="1500">
+                <a:solidFill>
+                  <a:srgbClr val="22282E"/>
+                </a:solidFill>
+              </a:rPr>
+              <a:t>•  Tres cosas que se confunden y no son lo mismo:</a:t>
+            </a:r>
+          </a:p>
+          <a:p>
+            <a:pPr>
+              <a:spcAft>
+                <a:spcPts val="600"/>
+              </a:spcAft>
+            </a:pPr>
+            <a:r>
+              <a:rPr sz="1500">
+                <a:solidFill>
+                  <a:srgbClr val="22282E"/>
+                </a:solidFill>
+              </a:rPr>
+              <a:t>•  Enfoque — En qué se basa</a:t>
+            </a:r>
+          </a:p>
+          <a:p>
+            <a:pPr>
+              <a:spcAft>
+                <a:spcPts val="600"/>
+              </a:spcAft>
+            </a:pPr>
+            <a:r>
+              <a:rPr sz="1500">
+                <a:solidFill>
+                  <a:srgbClr val="22282E"/>
+                </a:solidFill>
+              </a:rPr>
+              <a:t>•  Emulación — TTPs de un actor específico (CTI)</a:t>
+            </a:r>
+          </a:p>
+          <a:p>
+            <a:pPr>
+              <a:spcAft>
+                <a:spcPts val="600"/>
+              </a:spcAft>
+            </a:pPr>
+            <a:r>
+              <a:rPr sz="1500">
+                <a:solidFill>
+                  <a:srgbClr val="22282E"/>
+                </a:solidFill>
+              </a:rPr>
+              <a:t>•  Simulación — Comportamientos adversariales genéricos</a:t>
+            </a:r>
+          </a:p>
+          <a:p>
+            <a:pPr>
+              <a:spcAft>
+                <a:spcPts val="600"/>
+              </a:spcAft>
+            </a:pPr>
+            <a:r>
+              <a:rPr sz="1500">
+                <a:solidFill>
+                  <a:srgbClr val="22282E"/>
+                </a:solidFill>
+              </a:rPr>
+              <a:t>•  Ataque oportunista — Lo que el operador sepa hacer</a:t>
+            </a:r>
+          </a:p>
+          <a:p>
+            <a:pPr>
+              <a:spcAft>
+                <a:spcPts val="600"/>
+              </a:spcAft>
+            </a:pPr>
+            <a:r>
+              <a:rPr sz="1500">
+                <a:solidFill>
+                  <a:srgbClr val="22282E"/>
+                </a:solidFill>
+              </a:rPr>
+              <a:t>•  La emulación es la más realista y la más cara de preparar, porque exige inteligencia sólida. La simulación (por ejemplo con Atomic Red Team) es un buen primer paso cuando el cliente aún no tiene un…</a:t>
             </a:r>
           </a:p>
         </p:txBody>
@@ -4241,7 +4602,7 @@
                   <a:srgbClr val="0B3D2E"/>
                 </a:solidFill>
               </a:rPr>
-              <a:t>🧰 Herramientas y preparación</a:t>
+              <a:t>📖 Definiciones y características</a:t>
             </a:r>
           </a:p>
         </p:txBody>
@@ -4279,52 +4640,82 @@
                   <a:srgbClr val="22282E"/>
                 </a:solidFill>
               </a:rPr>
-              <a:t>•  MITRE Adversary Emulation Library.</a:t>
-            </a:r>
-          </a:p>
-          <a:p>
-            <a:pPr>
-              <a:spcAft>
-                <a:spcPts val="600"/>
-              </a:spcAft>
-            </a:pPr>
-            <a:r>
-              <a:rPr sz="1500">
-                <a:solidFill>
-                  <a:srgbClr val="22282E"/>
-                </a:solidFill>
-              </a:rPr>
-              <a:t>•  Informes de CTI públicos (Mandiant, CrowdStrike, Microsoft, DFIR Report).</a:t>
-            </a:r>
-          </a:p>
-          <a:p>
-            <a:pPr>
-              <a:spcAft>
-                <a:spcPts val="600"/>
-              </a:spcAft>
-            </a:pPr>
-            <a:r>
-              <a:rPr sz="1500">
-                <a:solidFill>
-                  <a:srgbClr val="22282E"/>
-                </a:solidFill>
-              </a:rPr>
-              <a:t>•  El laboratorio de las clases siguientes (C2 + AD lab) para ejecutar el plan más adelante.</a:t>
-            </a:r>
-          </a:p>
-          <a:p>
-            <a:pPr>
-              <a:spcAft>
-                <a:spcPts val="600"/>
-              </a:spcAft>
-            </a:pPr>
-            <a:r>
-              <a:rPr sz="1500">
-                <a:solidFill>
-                  <a:srgbClr val="22282E"/>
-                </a:solidFill>
-              </a:rPr>
-              <a:t>•  Herramientas de reproducción: Sliver/Mythic (C2), Impacket, y Atomic Red Team (Clase 180) para TTPs atómicos.</a:t>
+              <a:t>•  Adversary emulation: reproducción fiel del comportamiento de un actor específico basada en CTI. Característica: imita TTPs, no solo objetivos.</a:t>
+            </a:r>
+          </a:p>
+          <a:p>
+            <a:pPr>
+              <a:spcAft>
+                <a:spcPts val="600"/>
+              </a:spcAft>
+            </a:pPr>
+            <a:r>
+              <a:rPr sz="1500">
+                <a:solidFill>
+                  <a:srgbClr val="22282E"/>
+                </a:solidFill>
+              </a:rPr>
+              <a:t>•  Adversary simulation: uso de comportamientos adversariales genéricos sin atarse a un actor. Característica: menos específica, más rápida.</a:t>
+            </a:r>
+          </a:p>
+          <a:p>
+            <a:pPr>
+              <a:spcAft>
+                <a:spcPts val="600"/>
+              </a:spcAft>
+            </a:pPr>
+            <a:r>
+              <a:rPr sz="1500">
+                <a:solidFill>
+                  <a:srgbClr val="22282E"/>
+                </a:solidFill>
+              </a:rPr>
+              <a:t>•  TTP (Tactics, Techniques, Procedures): la firma comportamental de un actor. Característica: más difícil de cambiar que un IOC.</a:t>
+            </a:r>
+          </a:p>
+          <a:p>
+            <a:pPr>
+              <a:spcAft>
+                <a:spcPts val="600"/>
+              </a:spcAft>
+            </a:pPr>
+            <a:r>
+              <a:rPr sz="1500">
+                <a:solidFill>
+                  <a:srgbClr val="22282E"/>
+                </a:solidFill>
+              </a:rPr>
+              <a:t>•  Emulation Plan: documento paso a paso que reproduce a un actor. Característica: encadena TTPs con herramientas y comandos.</a:t>
+            </a:r>
+          </a:p>
+          <a:p>
+            <a:pPr>
+              <a:spcAft>
+                <a:spcPts val="600"/>
+              </a:spcAft>
+            </a:pPr>
+            <a:r>
+              <a:rPr sz="1500">
+                <a:solidFill>
+                  <a:srgbClr val="22282E"/>
+                </a:solidFill>
+              </a:rPr>
+              <a:t>•  CTI (Cyber Threat Intelligence): información sobre actores, campañas y TTPs. Característica: es la materia prima del plan.</a:t>
+            </a:r>
+          </a:p>
+          <a:p>
+            <a:pPr>
+              <a:spcAft>
+                <a:spcPts val="600"/>
+              </a:spcAft>
+            </a:pPr>
+            <a:r>
+              <a:rPr sz="1500">
+                <a:solidFill>
+                  <a:srgbClr val="22282E"/>
+                </a:solidFill>
+              </a:rPr>
+              <a:t>•  Micro-emulation: emulación de un comportamiento pequeño y aislado (CTID). Característica: modular y componible.</a:t>
             </a:r>
           </a:p>
         </p:txBody>
@@ -4375,7 +4766,7 @@
                   <a:srgbClr val="0B3D2E"/>
                 </a:solidFill>
               </a:rPr>
-              <a:t>🧪 Laboratorio guiado</a:t>
+              <a:t>📔 Glosario</a:t>
             </a:r>
           </a:p>
         </p:txBody>
@@ -4413,97 +4804,97 @@
                   <a:srgbClr val="22282E"/>
                 </a:solidFill>
               </a:rPr>
-              <a:t>•  Elige un actor. Toma APT29 (usaremos el plan público de la Emulation Library como referencia).</a:t>
-            </a:r>
-          </a:p>
-          <a:p>
-            <a:pPr>
-              <a:spcAft>
-                <a:spcPts val="600"/>
-              </a:spcAft>
-            </a:pPr>
-            <a:r>
-              <a:rPr sz="1500">
-                <a:solidFill>
-                  <a:srgbClr val="22282E"/>
-                </a:solidFill>
-              </a:rPr>
-              <a:t>•  Lee la CTI base. Revisa 2 informes públicos y anota las técnicas mencionadas con su ID ATT&amp;CK.</a:t>
-            </a:r>
-          </a:p>
-          <a:p>
-            <a:pPr>
-              <a:spcAft>
-                <a:spcPts val="600"/>
-              </a:spcAft>
-            </a:pPr>
-            <a:r>
-              <a:rPr sz="1500">
-                <a:solidFill>
-                  <a:srgbClr val="22282E"/>
-                </a:solidFill>
-              </a:rPr>
-              <a:t>•  Descarga el plan de MITRE. Clona la Emulation Library y abre el plan de APT29; identifica sus fases (Initial Access → Discovery → Credential Access → Lateral Movement → Collection → Exfiltration).</a:t>
-            </a:r>
-          </a:p>
-          <a:p>
-            <a:pPr>
-              <a:spcAft>
-                <a:spcPts val="600"/>
-              </a:spcAft>
-            </a:pPr>
-            <a:r>
-              <a:rPr sz="1500">
-                <a:solidFill>
-                  <a:srgbClr val="22282E"/>
-                </a:solidFill>
-              </a:rPr>
-              <a:t>•  Estructura tu plan. Crea una tabla con columnas: Fase | Técnica (ID) | Herramienta | Comando/acción | Detección esperada.</a:t>
-            </a:r>
-          </a:p>
-          <a:p>
-            <a:pPr>
-              <a:spcAft>
-                <a:spcPts val="600"/>
-              </a:spcAft>
-            </a:pPr>
-            <a:r>
-              <a:rPr sz="1500">
-                <a:solidFill>
-                  <a:srgbClr val="22282E"/>
-                </a:solidFill>
-              </a:rPr>
-              <a:t>•  Selecciona herramientas por TTP. Para "PowerShell download cradle" (T1059.001), decide reproducirlo con un stager de tu C2; para "credential dumping" (T1003.001), con un método equivalente a Mimikatz en el lab.</a:t>
-            </a:r>
-          </a:p>
-          <a:p>
-            <a:pPr>
-              <a:spcAft>
-                <a:spcPts val="600"/>
-              </a:spcAft>
-            </a:pPr>
-            <a:r>
-              <a:rPr sz="1500">
-                <a:solidFill>
-                  <a:srgbClr val="22282E"/>
-                </a:solidFill>
-              </a:rPr>
-              <a:t>•  Encadena las fases. Ordena los TTPs de forma que cada uno habilite al siguiente (ej. discovery antes que lateral movement).</a:t>
-            </a:r>
-          </a:p>
-          <a:p>
-            <a:pPr>
-              <a:spcAft>
-                <a:spcPts val="600"/>
-              </a:spcAft>
-            </a:pPr>
-            <a:r>
-              <a:rPr sz="1500">
-                <a:solidFill>
-                  <a:srgbClr val="22282E"/>
-                </a:solidFill>
-              </a:rPr>
-              <a:t>•  Define criterios de éxito y detección. Por cada fila, escribe qué evento debería generar y quién debería verlo.</a:t>
+              <a:t>•  Término — Definición concisa</a:t>
+            </a:r>
+          </a:p>
+          <a:p>
+            <a:pPr>
+              <a:spcAft>
+                <a:spcPts val="600"/>
+              </a:spcAft>
+            </a:pPr>
+            <a:r>
+              <a:rPr sz="1500">
+                <a:solidFill>
+                  <a:srgbClr val="22282E"/>
+                </a:solidFill>
+              </a:rPr>
+              <a:t>•  Adversary emulation — Reproducción fiel del comportamiento de un actor real, basada en CTI</a:t>
+            </a:r>
+          </a:p>
+          <a:p>
+            <a:pPr>
+              <a:spcAft>
+                <a:spcPts val="600"/>
+              </a:spcAft>
+            </a:pPr>
+            <a:r>
+              <a:rPr sz="1500">
+                <a:solidFill>
+                  <a:srgbClr val="22282E"/>
+                </a:solidFill>
+              </a:rPr>
+              <a:t>•  Adversary simulation — Uso de comportamientos adversariales genéricos, sin atarse a un actor</a:t>
+            </a:r>
+          </a:p>
+          <a:p>
+            <a:pPr>
+              <a:spcAft>
+                <a:spcPts val="600"/>
+              </a:spcAft>
+            </a:pPr>
+            <a:r>
+              <a:rPr sz="1500">
+                <a:solidFill>
+                  <a:srgbClr val="22282E"/>
+                </a:solidFill>
+              </a:rPr>
+              <a:t>•  TTP — Tácticas, técnicas y procedimientos; la firma comportamental de un actor</a:t>
+            </a:r>
+          </a:p>
+          <a:p>
+            <a:pPr>
+              <a:spcAft>
+                <a:spcPts val="600"/>
+              </a:spcAft>
+            </a:pPr>
+            <a:r>
+              <a:rPr sz="1500">
+                <a:solidFill>
+                  <a:srgbClr val="22282E"/>
+                </a:solidFill>
+              </a:rPr>
+              <a:t>•  CTI — Cyber Threat Intelligence: información sobre actores, campañas y TTPs</a:t>
+            </a:r>
+          </a:p>
+          <a:p>
+            <a:pPr>
+              <a:spcAft>
+                <a:spcPts val="600"/>
+              </a:spcAft>
+            </a:pPr>
+            <a:r>
+              <a:rPr sz="1500">
+                <a:solidFill>
+                  <a:srgbClr val="22282E"/>
+                </a:solidFill>
+              </a:rPr>
+              <a:t>•  Emulation Plan — Documento paso a paso que reproduce a un actor</a:t>
+            </a:r>
+          </a:p>
+          <a:p>
+            <a:pPr>
+              <a:spcAft>
+                <a:spcPts val="600"/>
+              </a:spcAft>
+            </a:pPr>
+            <a:r>
+              <a:rPr sz="1500">
+                <a:solidFill>
+                  <a:srgbClr val="22282E"/>
+                </a:solidFill>
+              </a:rPr>
+              <a:t>•  Emulation Library — Colección pública de planes validados por MITRE/CTID</a:t>
             </a:r>
           </a:p>
         </p:txBody>
@@ -4554,7 +4945,7 @@
                   <a:srgbClr val="0B3D2E"/>
                 </a:solidFill>
               </a:rPr>
-              <a:t>✍️ Ejercicios</a:t>
+              <a:t>🧰 Herramientas y preparación</a:t>
             </a:r>
           </a:p>
         </p:txBody>
@@ -4592,82 +4983,52 @@
                   <a:srgbClr val="22282E"/>
                 </a:solidFill>
               </a:rPr>
-              <a:t>•  Explica con un ejemplo la diferencia entre emulación y simulación.</a:t>
-            </a:r>
-          </a:p>
-          <a:p>
-            <a:pPr>
-              <a:spcAft>
-                <a:spcPts val="600"/>
-              </a:spcAft>
-            </a:pPr>
-            <a:r>
-              <a:rPr sz="1500">
-                <a:solidFill>
-                  <a:srgbClr val="22282E"/>
-                </a:solidFill>
-              </a:rPr>
-              <a:t>•  Extrae 8 TTPs de un informe público de CTI y mapéalos a ATT&amp;CK.</a:t>
-            </a:r>
-          </a:p>
-          <a:p>
-            <a:pPr>
-              <a:spcAft>
-                <a:spcPts val="600"/>
-              </a:spcAft>
-            </a:pPr>
-            <a:r>
-              <a:rPr sz="1500">
-                <a:solidFill>
-                  <a:srgbClr val="22282E"/>
-                </a:solidFill>
-              </a:rPr>
-              <a:t>•  Ordena esos 8 TTPs en fases coherentes de un ataque.</a:t>
-            </a:r>
-          </a:p>
-          <a:p>
-            <a:pPr>
-              <a:spcAft>
-                <a:spcPts val="600"/>
-              </a:spcAft>
-            </a:pPr>
-            <a:r>
-              <a:rPr sz="1500">
-                <a:solidFill>
-                  <a:srgbClr val="22282E"/>
-                </a:solidFill>
-              </a:rPr>
-              <a:t>•  Elige una herramienta para reproducir cada uno de 5 TTPs.</a:t>
-            </a:r>
-          </a:p>
-          <a:p>
-            <a:pPr>
-              <a:spcAft>
-                <a:spcPts val="600"/>
-              </a:spcAft>
-            </a:pPr>
-            <a:r>
-              <a:rPr sz="1500">
-                <a:solidFill>
-                  <a:srgbClr val="22282E"/>
-                </a:solidFill>
-              </a:rPr>
-              <a:t>•  Redacta el criterio de detección para tres fases.</a:t>
-            </a:r>
-          </a:p>
-          <a:p>
-            <a:pPr>
-              <a:spcAft>
-                <a:spcPts val="600"/>
-              </a:spcAft>
-            </a:pPr>
-            <a:r>
-              <a:rPr sz="1500">
-                <a:solidFill>
-                  <a:srgbClr val="22282E"/>
-                </a:solidFill>
-              </a:rPr>
-              <a:t>•  Compara dos planes de la Emulation Library y señala una diferencia de estilo entre los dos actores.</a:t>
+              <a:t>•  MITRE Adversary Emulation Library.</a:t>
+            </a:r>
+          </a:p>
+          <a:p>
+            <a:pPr>
+              <a:spcAft>
+                <a:spcPts val="600"/>
+              </a:spcAft>
+            </a:pPr>
+            <a:r>
+              <a:rPr sz="1500">
+                <a:solidFill>
+                  <a:srgbClr val="22282E"/>
+                </a:solidFill>
+              </a:rPr>
+              <a:t>•  Informes de CTI públicos (Mandiant, CrowdStrike, Microsoft, DFIR Report).</a:t>
+            </a:r>
+          </a:p>
+          <a:p>
+            <a:pPr>
+              <a:spcAft>
+                <a:spcPts val="600"/>
+              </a:spcAft>
+            </a:pPr>
+            <a:r>
+              <a:rPr sz="1500">
+                <a:solidFill>
+                  <a:srgbClr val="22282E"/>
+                </a:solidFill>
+              </a:rPr>
+              <a:t>•  El laboratorio de las clases siguientes (C2 + AD lab) para ejecutar el plan más adelante.</a:t>
+            </a:r>
+          </a:p>
+          <a:p>
+            <a:pPr>
+              <a:spcAft>
+                <a:spcPts val="600"/>
+              </a:spcAft>
+            </a:pPr>
+            <a:r>
+              <a:rPr sz="1500">
+                <a:solidFill>
+                  <a:srgbClr val="22282E"/>
+                </a:solidFill>
+              </a:rPr>
+              <a:t>•  Herramientas de reproducción: Sliver/Mythic (C2), Impacket, y Atomic Red Team (Clase 180) para TTPs atómicos.</a:t>
             </a:r>
           </a:p>
         </p:txBody>
@@ -4718,7 +5079,7 @@
                   <a:srgbClr val="0B3D2E"/>
                 </a:solidFill>
               </a:rPr>
-              <a:t>📝 Reto verificable</a:t>
+              <a:t>🧪 Laboratorio guiado</a:t>
             </a:r>
           </a:p>
         </p:txBody>
@@ -4756,22 +5117,97 @@
                   <a:srgbClr val="22282E"/>
                 </a:solidFill>
               </a:rPr>
-              <a:t>•  Entrega un plan de emulación de una página para un actor de tu elección (con base en CTI pública), que contenga al menos 10 TTPs organizados en 5 fases, la herramienta de reproducción por TTP y la detección esperada.</a:t>
-            </a:r>
-          </a:p>
-          <a:p>
-            <a:pPr>
-              <a:spcAft>
-                <a:spcPts val="600"/>
-              </a:spcAft>
-            </a:pPr>
-            <a:r>
-              <a:rPr sz="1500">
-                <a:solidFill>
-                  <a:srgbClr val="22282E"/>
-                </a:solidFill>
-              </a:rPr>
-              <a:t>•  Criterio de aceptación: cada TTP tiene ID ATT&amp;CK válido, hay continuidad lógica entre fases (cada una habilita la siguiente) y las herramientas elegidas reproducen el comportamiento descrito en la CTI.</a:t>
+              <a:t>•  Elige un actor. Toma APT29 (usaremos el plan público de la Emulation Library como referencia).</a:t>
+            </a:r>
+          </a:p>
+          <a:p>
+            <a:pPr>
+              <a:spcAft>
+                <a:spcPts val="600"/>
+              </a:spcAft>
+            </a:pPr>
+            <a:r>
+              <a:rPr sz="1500">
+                <a:solidFill>
+                  <a:srgbClr val="22282E"/>
+                </a:solidFill>
+              </a:rPr>
+              <a:t>•  Lee la CTI base. Revisa 2 informes públicos y anota las técnicas mencionadas con su ID ATT&amp;CK.</a:t>
+            </a:r>
+          </a:p>
+          <a:p>
+            <a:pPr>
+              <a:spcAft>
+                <a:spcPts val="600"/>
+              </a:spcAft>
+            </a:pPr>
+            <a:r>
+              <a:rPr sz="1500">
+                <a:solidFill>
+                  <a:srgbClr val="22282E"/>
+                </a:solidFill>
+              </a:rPr>
+              <a:t>•  Descarga el plan de MITRE. Clona la Emulation Library y abre el plan de APT29; identifica sus fases (Initial Access → Discovery → Credential Access → Lateral Movement → Collection → Exfiltration).</a:t>
+            </a:r>
+          </a:p>
+          <a:p>
+            <a:pPr>
+              <a:spcAft>
+                <a:spcPts val="600"/>
+              </a:spcAft>
+            </a:pPr>
+            <a:r>
+              <a:rPr sz="1500">
+                <a:solidFill>
+                  <a:srgbClr val="22282E"/>
+                </a:solidFill>
+              </a:rPr>
+              <a:t>•  Estructura tu plan. Crea una tabla con columnas: Fase | Técnica (ID) | Herramienta | Comando/acción | Detección esperada.</a:t>
+            </a:r>
+          </a:p>
+          <a:p>
+            <a:pPr>
+              <a:spcAft>
+                <a:spcPts val="600"/>
+              </a:spcAft>
+            </a:pPr>
+            <a:r>
+              <a:rPr sz="1500">
+                <a:solidFill>
+                  <a:srgbClr val="22282E"/>
+                </a:solidFill>
+              </a:rPr>
+              <a:t>•  Selecciona herramientas por TTP. Para "PowerShell download cradle" (T1059.001), decide reproducirlo con un stager de tu C2; para "credential dumping" (T1003.001), con un método equivalente a Mimikatz…</a:t>
+            </a:r>
+          </a:p>
+          <a:p>
+            <a:pPr>
+              <a:spcAft>
+                <a:spcPts val="600"/>
+              </a:spcAft>
+            </a:pPr>
+            <a:r>
+              <a:rPr sz="1500">
+                <a:solidFill>
+                  <a:srgbClr val="22282E"/>
+                </a:solidFill>
+              </a:rPr>
+              <a:t>•  Encadena las fases. Ordena los TTPs de forma que cada uno habilite al siguiente (ej. discovery antes que lateral movement).</a:t>
+            </a:r>
+          </a:p>
+          <a:p>
+            <a:pPr>
+              <a:spcAft>
+                <a:spcPts val="600"/>
+              </a:spcAft>
+            </a:pPr>
+            <a:r>
+              <a:rPr sz="1500">
+                <a:solidFill>
+                  <a:srgbClr val="22282E"/>
+                </a:solidFill>
+              </a:rPr>
+              <a:t>•  Define criterios de éxito y detección. Por cada fila, escribe qué evento debería generar y quién debería verlo.</a:t>
             </a:r>
           </a:p>
         </p:txBody>
